--- a/03-Ansible/03-Ansible-Fundamentals.pptx
+++ b/03-Ansible/03-Ansible-Fundamentals.pptx
@@ -7798,7 +7798,29 @@
                 <a:ea typeface="Arial" pitchFamily="34" charset="-122"/>
                 <a:cs typeface="Arial" pitchFamily="34" charset="-120"/>
               </a:rPr>
-              <a:t>Control Node: your laptop or CI/CD server (should be running on Linux)</a:t>
+              <a:t>Control Node: your laptop, dedicated </a:t>
+            </a:r>
+            <a:r>
+              <a:rPr lang="en-US" sz="1300" dirty="0" err="1">
+                <a:solidFill>
+                  <a:srgbClr val="3A4668"/>
+                </a:solidFill>
+                <a:latin typeface="Arial" pitchFamily="34" charset="0"/>
+                <a:ea typeface="Arial" pitchFamily="34" charset="-122"/>
+                <a:cs typeface="Arial" pitchFamily="34" charset="-120"/>
+              </a:rPr>
+              <a:t>linux</a:t>
+            </a:r>
+            <a:r>
+              <a:rPr lang="en-US" sz="1300" dirty="0">
+                <a:solidFill>
+                  <a:srgbClr val="3A4668"/>
+                </a:solidFill>
+                <a:latin typeface="Arial" pitchFamily="34" charset="0"/>
+                <a:ea typeface="Arial" pitchFamily="34" charset="-122"/>
+                <a:cs typeface="Arial" pitchFamily="34" charset="-120"/>
+              </a:rPr>
+              <a:t> server on cloud or CI/CD server (should be running on Linux)</a:t>
             </a:r>
             <a:endParaRPr lang="en-US" sz="1300" dirty="0"/>
           </a:p>
